--- a/m1/diapositivos/aula-06-voz-emprestada.pptx
+++ b/m1/diapositivos/aula-06-voz-emprestada.pptx
@@ -9640,7 +9640,7 @@
         <p:spPr>
           <a:xfrm>
             <a:off x="1005840" y="2697480"/>
-            <a:ext cx="0" cy="2182368"/>
+            <a:ext cx="0" cy="2563368"/>
           </a:xfrm>
           <a:prstGeom prst="line">
             <a:avLst/>
@@ -9756,7 +9756,7 @@
                 <a:ea typeface="Arial" pitchFamily="34" charset="-122"/>
                 <a:cs typeface="Arial" pitchFamily="34" charset="-120"/>
               </a:rPr>
-              <a:t>É um «eu» que segue uma regra conhecida: louvar a senhora como os provençais fazem</a:t>
+              <a:t>É um «eu» que segue um modelo: o louvor dos provençais</a:t>
             </a:r>
             <a:endParaRPr lang="en-US" sz="2400" dirty="0"/>
           </a:p>
@@ -9943,7 +9943,7 @@
         <p:spPr>
           <a:xfrm>
             <a:off x="1417320" y="4105656"/>
-            <a:ext cx="9174175" cy="600456"/>
+            <a:ext cx="9174175" cy="981456"/>
           </a:xfrm>
           <a:prstGeom prst="rect">
             <a:avLst/>
@@ -9972,7 +9972,7 @@
                 <a:ea typeface="Arial" pitchFamily="34" charset="-122"/>
                 <a:cs typeface="Arial" pitchFamily="34" charset="-120"/>
               </a:rPr>
-              <a:t>É um «eu» que troça dos trovadores da Provença</a:t>
+              <a:t>É um «eu» que troça do louvor dos trovadores da Provença</a:t>
             </a:r>
             <a:endParaRPr lang="en-US" sz="2400" dirty="0"/>
           </a:p>
@@ -9986,7 +9986,7 @@
         </p:nvSpPr>
         <p:spPr>
           <a:xfrm>
-            <a:off x="822960" y="4696968"/>
+            <a:off x="822960" y="5077968"/>
             <a:ext cx="365760" cy="365760"/>
           </a:xfrm>
           <a:prstGeom prst="ellipse">
@@ -10011,7 +10011,7 @@
         </p:nvSpPr>
         <p:spPr>
           <a:xfrm>
-            <a:off x="822960" y="4696968"/>
+            <a:off x="822960" y="5077968"/>
             <a:ext cx="365760" cy="365760"/>
           </a:xfrm>
           <a:prstGeom prst="rect">
@@ -10050,8 +10050,8 @@
         </p:nvSpPr>
         <p:spPr>
           <a:xfrm>
-            <a:off x="1417320" y="4706112"/>
-            <a:ext cx="9174175" cy="600456"/>
+            <a:off x="1417320" y="5087112"/>
+            <a:ext cx="9174175" cy="981456"/>
           </a:xfrm>
           <a:prstGeom prst="rect">
             <a:avLst/>
@@ -10080,7 +10080,7 @@
                 <a:ea typeface="Arial" pitchFamily="34" charset="-122"/>
                 <a:cs typeface="Arial" pitchFamily="34" charset="-120"/>
               </a:rPr>
-              <a:t>É um «eu» de uma rapariga que espera o amigo</a:t>
+              <a:t>É um «eu» de uma rapariga que espera o amigo que partiu</a:t>
             </a:r>
             <a:endParaRPr lang="en-US" sz="2400" dirty="0"/>
           </a:p>
@@ -10331,7 +10331,7 @@
                 <a:ea typeface="Arial" pitchFamily="34" charset="-122"/>
                 <a:cs typeface="Arial" pitchFamily="34" charset="-120"/>
               </a:rPr>
-              <a:t>É um «eu» que segue uma regra conhecida: louvar a senhora como os provençais fazem</a:t>
+              <a:t>É um «eu» que segue um modelo: o louvor dos provençais</a:t>
             </a:r>
             <a:endParaRPr lang="en-US" sz="3400" dirty="0"/>
           </a:p>
@@ -16193,7 +16193,7 @@
         <p:spPr>
           <a:xfrm>
             <a:off x="1005840" y="2697480"/>
-            <a:ext cx="0" cy="2563368"/>
+            <a:ext cx="0" cy="2944368"/>
           </a:xfrm>
           <a:prstGeom prst="line">
             <a:avLst/>
@@ -16309,7 +16309,7 @@
                 <a:ea typeface="Arial" pitchFamily="34" charset="-122"/>
                 <a:cs typeface="Arial" pitchFamily="34" charset="-120"/>
               </a:rPr>
-              <a:t>Que sabe fazer bem os seus ofícios e que Guilhade não é quem pode julgá-los</a:t>
+              <a:t>Que sabe os seus ofícios e Guilhade não os sabe julgar</a:t>
             </a:r>
             <a:endParaRPr lang="en-US" sz="2400" dirty="0"/>
           </a:p>
@@ -16388,7 +16388,7 @@
         <p:spPr>
           <a:xfrm>
             <a:off x="1417320" y="3505200"/>
-            <a:ext cx="9174175" cy="600456"/>
+            <a:ext cx="9174175" cy="981456"/>
           </a:xfrm>
           <a:prstGeom prst="rect">
             <a:avLst/>
@@ -16417,7 +16417,7 @@
                 <a:ea typeface="Arial" pitchFamily="34" charset="-122"/>
                 <a:cs typeface="Arial" pitchFamily="34" charset="-120"/>
               </a:rPr>
-              <a:t>Que desiste de trovar e volta a tocar cítola</a:t>
+              <a:t>Que desiste de trovar e volta só a tocar a sua cítola</a:t>
             </a:r>
             <a:endParaRPr lang="en-US" sz="2400" dirty="0"/>
           </a:p>
@@ -16431,7 +16431,7 @@
         </p:nvSpPr>
         <p:spPr>
           <a:xfrm>
-            <a:off x="822960" y="4096512"/>
+            <a:off x="822960" y="4477512"/>
             <a:ext cx="365760" cy="365760"/>
           </a:xfrm>
           <a:prstGeom prst="ellipse">
@@ -16456,7 +16456,7 @@
         </p:nvSpPr>
         <p:spPr>
           <a:xfrm>
-            <a:off x="822960" y="4096512"/>
+            <a:off x="822960" y="4477512"/>
             <a:ext cx="365760" cy="365760"/>
           </a:xfrm>
           <a:prstGeom prst="rect">
@@ -16495,7 +16495,7 @@
         </p:nvSpPr>
         <p:spPr>
           <a:xfrm>
-            <a:off x="1417320" y="4105656"/>
+            <a:off x="1417320" y="4486656"/>
             <a:ext cx="9174175" cy="981456"/>
           </a:xfrm>
           <a:prstGeom prst="rect">
@@ -16539,7 +16539,7 @@
         </p:nvSpPr>
         <p:spPr>
           <a:xfrm>
-            <a:off x="822960" y="5077968"/>
+            <a:off x="822960" y="5458968"/>
             <a:ext cx="365760" cy="365760"/>
           </a:xfrm>
           <a:prstGeom prst="ellipse">
@@ -16564,7 +16564,7 @@
         </p:nvSpPr>
         <p:spPr>
           <a:xfrm>
-            <a:off x="822960" y="5077968"/>
+            <a:off x="822960" y="5458968"/>
             <a:ext cx="365760" cy="365760"/>
           </a:xfrm>
           <a:prstGeom prst="rect">
@@ -16603,7 +16603,7 @@
         </p:nvSpPr>
         <p:spPr>
           <a:xfrm>
-            <a:off x="1417320" y="5087112"/>
+            <a:off x="1417320" y="5468112"/>
             <a:ext cx="9174175" cy="600456"/>
           </a:xfrm>
           <a:prstGeom prst="rect">
@@ -16633,7 +16633,7 @@
                 <a:ea typeface="Arial" pitchFamily="34" charset="-122"/>
                 <a:cs typeface="Arial" pitchFamily="34" charset="-120"/>
               </a:rPr>
-              <a:t>Que nunca quis ser trovador, só jogral</a:t>
+              <a:t>Que nunca quis ser trovador, só um jogral de ofício</a:t>
             </a:r>
             <a:endParaRPr lang="en-US" sz="2400" dirty="0"/>
           </a:p>
@@ -16884,7 +16884,7 @@
                 <a:ea typeface="Arial" pitchFamily="34" charset="-122"/>
                 <a:cs typeface="Arial" pitchFamily="34" charset="-120"/>
               </a:rPr>
-              <a:t>Que sabe fazer bem os seus ofícios e que Guilhade não é quem pode julgá-los</a:t>
+              <a:t>Que sabe os seus ofícios e Guilhade não os sabe julgar</a:t>
             </a:r>
             <a:endParaRPr lang="en-US" sz="3400" dirty="0"/>
           </a:p>
@@ -19623,7 +19623,7 @@
         <p:spPr>
           <a:xfrm>
             <a:off x="1005840" y="2697480"/>
-            <a:ext cx="0" cy="2944368"/>
+            <a:ext cx="0" cy="2753868"/>
           </a:xfrm>
           <a:prstGeom prst="line">
             <a:avLst/>
@@ -19710,7 +19710,7 @@
         <p:spPr>
           <a:xfrm>
             <a:off x="1417320" y="2523744"/>
-            <a:ext cx="9174175" cy="1362456"/>
+            <a:ext cx="9174175" cy="917956"/>
           </a:xfrm>
           <a:prstGeom prst="rect">
             <a:avLst/>
@@ -19731,7 +19731,7 @@
               <a:buNone/>
             </a:pPr>
             <a:r>
-              <a:rPr lang="en-US" sz="2400" dirty="0">
+              <a:rPr lang="en-US" sz="2200" dirty="0">
                 <a:solidFill>
                   <a:srgbClr val="F2F0EA"/>
                 </a:solidFill>
@@ -19739,9 +19739,9 @@
                 <a:ea typeface="Arial" pitchFamily="34" charset="-122"/>
                 <a:cs typeface="Arial" pitchFamily="34" charset="-120"/>
               </a:rPr>
-              <a:t>Que só cantam o amor no tempo da flor, para afirmar que a coita dele, que não depende da estação, é verdadeira</a:t>
-            </a:r>
-            <a:endParaRPr lang="en-US" sz="2400" dirty="0"/>
+              <a:t>Que só trovam no tempo da flor, para provar a verdade da coita dele</a:t>
+            </a:r>
+            <a:endParaRPr lang="en-US" sz="2200" dirty="0"/>
           </a:p>
         </p:txBody>
       </p:sp>
@@ -19753,7 +19753,7 @@
         </p:nvSpPr>
         <p:spPr>
           <a:xfrm>
-            <a:off x="822960" y="3877056"/>
+            <a:off x="822960" y="3432556"/>
             <a:ext cx="365760" cy="365760"/>
           </a:xfrm>
           <a:prstGeom prst="ellipse">
@@ -19778,7 +19778,7 @@
         </p:nvSpPr>
         <p:spPr>
           <a:xfrm>
-            <a:off x="822960" y="3877056"/>
+            <a:off x="822960" y="3432556"/>
             <a:ext cx="365760" cy="365760"/>
           </a:xfrm>
           <a:prstGeom prst="rect">
@@ -19817,8 +19817,8 @@
         </p:nvSpPr>
         <p:spPr>
           <a:xfrm>
-            <a:off x="1417320" y="3886200"/>
-            <a:ext cx="9174175" cy="981456"/>
+            <a:off x="1417320" y="3441700"/>
+            <a:ext cx="9174175" cy="917956"/>
           </a:xfrm>
           <a:prstGeom prst="rect">
             <a:avLst/>
@@ -19839,7 +19839,7 @@
               <a:buNone/>
             </a:pPr>
             <a:r>
-              <a:rPr lang="en-US" sz="2400" dirty="0">
+              <a:rPr lang="en-US" sz="2200" dirty="0">
                 <a:solidFill>
                   <a:srgbClr val="F2F0EA"/>
                 </a:solidFill>
@@ -19849,7 +19849,7 @@
               </a:rPr>
               <a:t>Que cantam mal, para mostrar que o galego-português é melhor língua</a:t>
             </a:r>
-            <a:endParaRPr lang="en-US" sz="2400" dirty="0"/>
+            <a:endParaRPr lang="en-US" sz="2200" dirty="0"/>
           </a:p>
         </p:txBody>
       </p:sp>
@@ -19861,7 +19861,7 @@
         </p:nvSpPr>
         <p:spPr>
           <a:xfrm>
-            <a:off x="822960" y="4858512"/>
+            <a:off x="822960" y="4350512"/>
             <a:ext cx="365760" cy="365760"/>
           </a:xfrm>
           <a:prstGeom prst="ellipse">
@@ -19886,7 +19886,7 @@
         </p:nvSpPr>
         <p:spPr>
           <a:xfrm>
-            <a:off x="822960" y="4858512"/>
+            <a:off x="822960" y="4350512"/>
             <a:ext cx="365760" cy="365760"/>
           </a:xfrm>
           <a:prstGeom prst="rect">
@@ -19925,8 +19925,8 @@
         </p:nvSpPr>
         <p:spPr>
           <a:xfrm>
-            <a:off x="1417320" y="4867656"/>
-            <a:ext cx="9174175" cy="600456"/>
+            <a:off x="1417320" y="4359656"/>
+            <a:ext cx="9174175" cy="917956"/>
           </a:xfrm>
           <a:prstGeom prst="rect">
             <a:avLst/>
@@ -19947,7 +19947,7 @@
               <a:buNone/>
             </a:pPr>
             <a:r>
-              <a:rPr lang="en-US" sz="2400" dirty="0">
+              <a:rPr lang="en-US" sz="2200" dirty="0">
                 <a:solidFill>
                   <a:srgbClr val="F2F0EA"/>
                 </a:solidFill>
@@ -19955,9 +19955,9 @@
                 <a:ea typeface="Arial" pitchFamily="34" charset="-122"/>
                 <a:cs typeface="Arial" pitchFamily="34" charset="-120"/>
               </a:rPr>
-              <a:t>Que não têm senhora, para se rir deles</a:t>
-            </a:r>
-            <a:endParaRPr lang="en-US" sz="2400" dirty="0"/>
+              <a:t>Que não têm senhora a quem servir, para assim se rir deles</a:t>
+            </a:r>
+            <a:endParaRPr lang="en-US" sz="2200" dirty="0"/>
           </a:p>
         </p:txBody>
       </p:sp>
@@ -19969,7 +19969,7 @@
         </p:nvSpPr>
         <p:spPr>
           <a:xfrm>
-            <a:off x="822960" y="5458968"/>
+            <a:off x="822960" y="5268468"/>
             <a:ext cx="365760" cy="365760"/>
           </a:xfrm>
           <a:prstGeom prst="ellipse">
@@ -19994,7 +19994,7 @@
         </p:nvSpPr>
         <p:spPr>
           <a:xfrm>
-            <a:off x="822960" y="5458968"/>
+            <a:off x="822960" y="5268468"/>
             <a:ext cx="365760" cy="365760"/>
           </a:xfrm>
           <a:prstGeom prst="rect">
@@ -20033,8 +20033,8 @@
         </p:nvSpPr>
         <p:spPr>
           <a:xfrm>
-            <a:off x="1417320" y="5468112"/>
-            <a:ext cx="9174175" cy="600456"/>
+            <a:off x="1417320" y="5277612"/>
+            <a:ext cx="9174175" cy="568706"/>
           </a:xfrm>
           <a:prstGeom prst="rect">
             <a:avLst/>
@@ -20055,7 +20055,7 @@
               <a:buNone/>
             </a:pPr>
             <a:r>
-              <a:rPr lang="en-US" sz="2400" dirty="0">
+              <a:rPr lang="en-US" sz="2200" dirty="0">
                 <a:solidFill>
                   <a:srgbClr val="F2F0EA"/>
                 </a:solidFill>
@@ -20063,9 +20063,9 @@
                 <a:ea typeface="Arial" pitchFamily="34" charset="-122"/>
                 <a:cs typeface="Arial" pitchFamily="34" charset="-120"/>
               </a:rPr>
-              <a:t>Que o ensinaram a trovar, para lhes agradecer</a:t>
-            </a:r>
-            <a:endParaRPr lang="en-US" sz="2400" dirty="0"/>
+              <a:t>Que o ensinaram a trovar, e quer agradecer-lhes por isso</a:t>
+            </a:r>
+            <a:endParaRPr lang="en-US" sz="2200" dirty="0"/>
           </a:p>
         </p:txBody>
       </p:sp>
@@ -20306,7 +20306,7 @@
               <a:buNone/>
             </a:pPr>
             <a:r>
-              <a:rPr lang="en-US" sz="2800" b="1" dirty="0">
+              <a:rPr lang="en-US" sz="3400" b="1" dirty="0">
                 <a:solidFill>
                   <a:srgbClr val="F2F0EA"/>
                 </a:solidFill>
@@ -20314,9 +20314,9 @@
                 <a:ea typeface="Arial" pitchFamily="34" charset="-122"/>
                 <a:cs typeface="Arial" pitchFamily="34" charset="-120"/>
               </a:rPr>
-              <a:t>Que só cantam o amor no tempo da flor, para afirmar que a coita dele, que não depende da estação, é verdadeira</a:t>
-            </a:r>
-            <a:endParaRPr lang="en-US" sz="2800" dirty="0"/>
+              <a:t>Que só trovam no tempo da flor, para provar a verdade da coita dele</a:t>
+            </a:r>
+            <a:endParaRPr lang="en-US" sz="3400" dirty="0"/>
           </a:p>
         </p:txBody>
       </p:sp>
